--- a/Apresentação/Apresentação do Robo resolvedor de cubo magico.pptx
+++ b/Apresentação/Apresentação do Robo resolvedor de cubo magico.pptx
@@ -10242,7 +10242,7 @@
         <p:spPr>
           <a:xfrm>
             <a:off x="1519826" y="1481299"/>
-            <a:ext cx="8912029" cy="2893009"/>
+            <a:ext cx="8912029" cy="3323896"/>
           </a:xfrm>
           <a:prstGeom prst="rect">
             <a:avLst/>
@@ -10343,6 +10343,30 @@
               </a:rPr>
               <a:t>Danilo Cristino de Lima			     RA:2301664</a:t>
             </a:r>
+          </a:p>
+          <a:p>
+            <a:pPr marL="280736" indent="-280736" algn="just">
+              <a:buSzPts val="2800"/>
+              <a:buFont typeface="Times"/>
+              <a:buChar char="•"/>
+            </a:pPr>
+            <a:r>
+              <a:rPr lang="pt-BR" sz="2800">
+                <a:solidFill>
+                  <a:schemeClr val="tx1"/>
+                </a:solidFill>
+                <a:latin typeface="Times"/>
+                <a:cs typeface="Times"/>
+              </a:rPr>
+              <a:t>Pedro Henrique Teixeira Gonçalves                RA:2101531</a:t>
+            </a:r>
+            <a:endParaRPr lang="pt-BR" sz="2800" dirty="0">
+              <a:solidFill>
+                <a:schemeClr val="tx1"/>
+              </a:solidFill>
+              <a:latin typeface="Times"/>
+              <a:cs typeface="Times"/>
+            </a:endParaRPr>
           </a:p>
           <a:p>
             <a:pPr marL="280736" indent="-280736" algn="just">
